--- a/Numpy.pptx
+++ b/Numpy.pptx
@@ -4575,6 +4575,13 @@
   <p:clrMapOvr>
     <a:masterClrMapping/>
   </p:clrMapOvr>
+  <p:timing>
+    <p:tnLst>
+      <p:par>
+        <p:cTn id="1" dur="indefinite" restart="never" nodeType="tmRoot"/>
+      </p:par>
+    </p:tnLst>
+  </p:timing>
 </p:sld>
 </file>
 
@@ -4620,49 +4627,52 @@
       </p:sp>
       <p:sp>
         <p:nvSpPr>
-          <p:cNvPr id="3" name="TextBox 2"/>
-          <p:cNvSpPr txBox="1"/>
+          <p:cNvPr id="4" name="직사각형 3"/>
+          <p:cNvSpPr/>
           <p:nvPr/>
         </p:nvSpPr>
         <p:spPr>
           <a:xfrm>
-            <a:off x="2122098" y="2130725"/>
-            <a:ext cx="3858749" cy="1477328"/>
+            <a:off x="1412702" y="2264088"/>
+            <a:ext cx="5726248" cy="600870"/>
           </a:xfrm>
           <a:prstGeom prst="rect">
             <a:avLst/>
           </a:prstGeom>
-          <a:noFill/>
-        </p:spPr>
-        <p:txBody>
-          <a:bodyPr wrap="none" rtlCol="0">
+        </p:spPr>
+        <p:txBody>
+          <a:bodyPr wrap="none">
             <a:spAutoFit/>
           </a:bodyPr>
           <a:lstStyle/>
           <a:p>
-            <a:r>
-              <a:rPr lang="en-US" altLang="ko-KR" dirty="0" smtClean="0">
+            <a:pPr algn="just" fontAlgn="base">
+              <a:lnSpc>
+                <a:spcPct val="160000"/>
+              </a:lnSpc>
+            </a:pPr>
+            <a:r>
+              <a:rPr lang="en-US" altLang="ko-KR" sz="2400" u="sng" kern="0" dirty="0">
+                <a:solidFill>
+                  <a:srgbClr val="0000FF"/>
+                </a:solidFill>
+                <a:uFill>
+                  <a:solidFill>
+                    <a:srgbClr val="0000FF"/>
+                  </a:solidFill>
+                </a:uFill>
+                <a:latin typeface="함초롬바탕" panose="02030604000101010101" pitchFamily="18" charset="-127"/>
+                <a:ea typeface="함초롬바탕" panose="02030604000101010101" pitchFamily="18" charset="-127"/>
                 <a:hlinkClick r:id="rId2"/>
               </a:rPr>
-              <a:t>http://github.com/changkim88/stat</a:t>
-            </a:r>
-            <a:endParaRPr lang="en-US" altLang="ko-KR" dirty="0" smtClean="0"/>
-          </a:p>
-          <a:p>
-            <a:endParaRPr lang="en-US" altLang="ko-KR" dirty="0" smtClean="0"/>
-          </a:p>
-          <a:p>
-            <a:endParaRPr lang="en-US" altLang="ko-KR" dirty="0" smtClean="0"/>
-          </a:p>
-          <a:p>
-            <a:r>
-              <a:rPr lang="en-US" altLang="ko-KR" dirty="0" smtClean="0"/>
-              <a:t>github.com/changkim88/model</a:t>
-            </a:r>
-            <a:endParaRPr lang="en-US" altLang="ko-KR" dirty="0"/>
-          </a:p>
-          <a:p>
-            <a:endParaRPr lang="ko-KR" altLang="en-US" dirty="0"/>
+              <a:t>https://github.com/changkim88/stat</a:t>
+            </a:r>
+            <a:endParaRPr lang="en-US" altLang="ko-KR" sz="2400" kern="0" dirty="0">
+              <a:solidFill>
+                <a:srgbClr val="000000"/>
+              </a:solidFill>
+              <a:latin typeface="함초롬바탕" panose="02030604000101010101" pitchFamily="18" charset="-127"/>
+            </a:endParaRPr>
           </a:p>
         </p:txBody>
       </p:sp>
@@ -4676,6 +4686,13 @@
   <p:clrMapOvr>
     <a:masterClrMapping/>
   </p:clrMapOvr>
+  <p:timing>
+    <p:tnLst>
+      <p:par>
+        <p:cTn id="1" dur="indefinite" restart="never" nodeType="tmRoot"/>
+      </p:par>
+    </p:tnLst>
+  </p:timing>
 </p:sld>
 </file>
 
